--- a/presentations/b00-orientation/B00_Orientation_Narrated.pptx
+++ b/presentations/b00-orientation/B00_Orientation_Narrated.pptx
@@ -185,7 +185,7 @@
     </p:spTree>
     <p:extLst>
       <p:ext uri="{BB962C8B-B14F-4D97-AF65-F5344CB8AC3E}">
-        <p14:creationId xmlns:p14="http://schemas.microsoft.com/office/powerpoint/2010/main" val="2181077251"/>
+        <p14:creationId xmlns:p14="http://schemas.microsoft.com/office/powerpoint/2010/main" val="1275640254"/>
       </p:ext>
     </p:extLst>
   </p:cSld>
@@ -2421,7 +2421,7 @@
             <a:hlinkClick r:id="" action="ppaction://media"/>
             <a:extLst>
               <a:ext uri="{FF2B5EF4-FFF2-40B4-BE49-F238E27FC236}">
-                <a16:creationId xmlns:a16="http://schemas.microsoft.com/office/drawing/2014/main" id="{BF302155-E2CD-75D9-BB21-32690A8AE6AD}"/>
+                <a16:creationId xmlns:a16="http://schemas.microsoft.com/office/drawing/2014/main" id="{D9C4D905-0C1D-6A57-572A-A3B1F66823FB}"/>
               </a:ext>
             </a:extLst>
           </p:cNvPr>
@@ -2437,7 +2437,7 @@
                     <p:ext uri="{3AFAAA56-56D3-431D-BCD4-E75A35582382}">
                       <p173:tracksInfo xmlns:p173="http://schemas.microsoft.com/office/powerpoint/2017/3/main" displayLoc="slide">
                         <p173:trackLst>
-                          <p173:track id="{5FC5E64A-2741-433D-BDA7-0B110B153956}" label="English (captions)" lang="en-US" r:embed="rId6"/>
+                          <p173:track id="{E24DF5F3-02DD-4590-8777-77A1F3CE2467}" label="English (captions)" lang="en-US" r:embed="rId6"/>
                         </p173:trackLst>
                       </p173:tracksInfo>
                     </p:ext>
@@ -2455,7 +2455,7 @@
         </p:blipFill>
         <p:spPr>
           <a:xfrm>
-            <a:off x="127000" y="6350000"/>
+            <a:off x="12446000" y="127000"/>
             <a:ext cx="304800" cy="304800"/>
           </a:xfrm>
           <a:prstGeom prst="rect">
@@ -5196,7 +5196,7 @@
             <a:hlinkClick r:id="" action="ppaction://media"/>
             <a:extLst>
               <a:ext uri="{FF2B5EF4-FFF2-40B4-BE49-F238E27FC236}">
-                <a16:creationId xmlns:a16="http://schemas.microsoft.com/office/drawing/2014/main" id="{C394504D-4039-3DDB-4582-F05AC7611F0F}"/>
+                <a16:creationId xmlns:a16="http://schemas.microsoft.com/office/drawing/2014/main" id="{4CA55FB4-D7B3-9980-D93C-311CC7B651AD}"/>
               </a:ext>
             </a:extLst>
           </p:cNvPr>
@@ -5212,7 +5212,7 @@
                     <p:ext uri="{3AFAAA56-56D3-431D-BCD4-E75A35582382}">
                       <p173:tracksInfo xmlns:p173="http://schemas.microsoft.com/office/powerpoint/2017/3/main" displayLoc="slide">
                         <p173:trackLst>
-                          <p173:track id="{574ABDA0-C1BA-42F8-B1E4-0BF4B8BB2ACE}" label="English (captions)" lang="en-US" r:embed="rId7"/>
+                          <p173:track id="{77D10424-4A6B-42D4-85EC-0E988B4DAA74}" label="English (captions)" lang="en-US" r:embed="rId7"/>
                         </p173:trackLst>
                       </p173:tracksInfo>
                     </p:ext>
@@ -5230,7 +5230,7 @@
         </p:blipFill>
         <p:spPr>
           <a:xfrm>
-            <a:off x="127000" y="6350000"/>
+            <a:off x="12446000" y="127000"/>
             <a:ext cx="304800" cy="304800"/>
           </a:xfrm>
           <a:prstGeom prst="rect">
@@ -6960,7 +6960,7 @@
             <a:hlinkClick r:id="" action="ppaction://media"/>
             <a:extLst>
               <a:ext uri="{FF2B5EF4-FFF2-40B4-BE49-F238E27FC236}">
-                <a16:creationId xmlns:a16="http://schemas.microsoft.com/office/drawing/2014/main" id="{E8645FB5-218E-A60B-D027-D8BCE7435948}"/>
+                <a16:creationId xmlns:a16="http://schemas.microsoft.com/office/drawing/2014/main" id="{8C592213-3FAB-E54D-710C-AEF8F122FEE9}"/>
               </a:ext>
             </a:extLst>
           </p:cNvPr>
@@ -6976,7 +6976,7 @@
                     <p:ext uri="{3AFAAA56-56D3-431D-BCD4-E75A35582382}">
                       <p173:tracksInfo xmlns:p173="http://schemas.microsoft.com/office/powerpoint/2017/3/main" displayLoc="slide">
                         <p173:trackLst>
-                          <p173:track id="{E13D128F-6E5D-40B1-AB6B-224F404F0C31}" label="English (captions)" lang="en-US" r:embed="rId8"/>
+                          <p173:track id="{3EAA54D7-8357-4F9B-88B3-5425173B9A2D}" label="English (captions)" lang="en-US" r:embed="rId8"/>
                         </p173:trackLst>
                       </p173:tracksInfo>
                     </p:ext>
@@ -6994,7 +6994,7 @@
         </p:blipFill>
         <p:spPr>
           <a:xfrm>
-            <a:off x="127000" y="6350000"/>
+            <a:off x="12446000" y="127000"/>
             <a:ext cx="304800" cy="304800"/>
           </a:xfrm>
           <a:prstGeom prst="rect">
@@ -8365,7 +8365,7 @@
             <a:hlinkClick r:id="" action="ppaction://media"/>
             <a:extLst>
               <a:ext uri="{FF2B5EF4-FFF2-40B4-BE49-F238E27FC236}">
-                <a16:creationId xmlns:a16="http://schemas.microsoft.com/office/drawing/2014/main" id="{255E7522-679A-7509-FF44-DB1D760C0B63}"/>
+                <a16:creationId xmlns:a16="http://schemas.microsoft.com/office/drawing/2014/main" id="{A01418C5-21A1-B2FE-8C6E-8FB55C24E320}"/>
               </a:ext>
             </a:extLst>
           </p:cNvPr>
@@ -8381,7 +8381,7 @@
                     <p:ext uri="{3AFAAA56-56D3-431D-BCD4-E75A35582382}">
                       <p173:tracksInfo xmlns:p173="http://schemas.microsoft.com/office/powerpoint/2017/3/main" displayLoc="slide">
                         <p173:trackLst>
-                          <p173:track id="{A8BB307F-E395-4884-BCDE-EF788E0A555C}" label="English (captions)" lang="en-US" r:embed="rId11"/>
+                          <p173:track id="{E29D646C-ECEE-4B83-A11C-66C64B1666AE}" label="English (captions)" lang="en-US" r:embed="rId11"/>
                         </p173:trackLst>
                       </p173:tracksInfo>
                     </p:ext>
@@ -8399,7 +8399,7 @@
         </p:blipFill>
         <p:spPr>
           <a:xfrm>
-            <a:off x="127000" y="6350000"/>
+            <a:off x="12446000" y="127000"/>
             <a:ext cx="304800" cy="304800"/>
           </a:xfrm>
           <a:prstGeom prst="rect">
@@ -9468,7 +9468,7 @@
             <a:hlinkClick r:id="" action="ppaction://media"/>
             <a:extLst>
               <a:ext uri="{FF2B5EF4-FFF2-40B4-BE49-F238E27FC236}">
-                <a16:creationId xmlns:a16="http://schemas.microsoft.com/office/drawing/2014/main" id="{8275812B-A159-3C45-B95C-0525EFC84138}"/>
+                <a16:creationId xmlns:a16="http://schemas.microsoft.com/office/drawing/2014/main" id="{EAEB458F-1223-CF60-F127-69A0CE56B0F0}"/>
               </a:ext>
             </a:extLst>
           </p:cNvPr>
@@ -9484,7 +9484,7 @@
                     <p:ext uri="{3AFAAA56-56D3-431D-BCD4-E75A35582382}">
                       <p173:tracksInfo xmlns:p173="http://schemas.microsoft.com/office/powerpoint/2017/3/main" displayLoc="slide">
                         <p173:trackLst>
-                          <p173:track id="{9E6D5E97-2F77-4A81-83CF-5E644A10E281}" label="English (captions)" lang="en-US" r:embed="rId11"/>
+                          <p173:track id="{C0CB4AC1-8B39-4078-A206-D7EB2129EB67}" label="English (captions)" lang="en-US" r:embed="rId11"/>
                         </p173:trackLst>
                       </p173:tracksInfo>
                     </p:ext>
@@ -9502,7 +9502,7 @@
         </p:blipFill>
         <p:spPr>
           <a:xfrm>
-            <a:off x="127000" y="6350000"/>
+            <a:off x="12446000" y="127000"/>
             <a:ext cx="304800" cy="304800"/>
           </a:xfrm>
           <a:prstGeom prst="rect">
@@ -10659,7 +10659,7 @@
             <a:hlinkClick r:id="" action="ppaction://media"/>
             <a:extLst>
               <a:ext uri="{FF2B5EF4-FFF2-40B4-BE49-F238E27FC236}">
-                <a16:creationId xmlns:a16="http://schemas.microsoft.com/office/drawing/2014/main" id="{876A9B8D-3FB6-9F3B-4C8F-2F4C1397B4EF}"/>
+                <a16:creationId xmlns:a16="http://schemas.microsoft.com/office/drawing/2014/main" id="{EFDB6F6D-C76E-EFB8-E22D-B5D1A3F2C94E}"/>
               </a:ext>
             </a:extLst>
           </p:cNvPr>
@@ -10675,7 +10675,7 @@
                     <p:ext uri="{3AFAAA56-56D3-431D-BCD4-E75A35582382}">
                       <p173:tracksInfo xmlns:p173="http://schemas.microsoft.com/office/powerpoint/2017/3/main" displayLoc="slide">
                         <p173:trackLst>
-                          <p173:track id="{A0BC716B-7F46-4E36-9EEC-62D1A7FB4A65}" label="English (captions)" lang="en-US" r:embed="rId8"/>
+                          <p173:track id="{2ADDE146-4351-4AA5-AFAE-BBF27A282934}" label="English (captions)" lang="en-US" r:embed="rId8"/>
                         </p173:trackLst>
                       </p173:tracksInfo>
                     </p:ext>
@@ -10693,7 +10693,7 @@
         </p:blipFill>
         <p:spPr>
           <a:xfrm>
-            <a:off x="127000" y="6350000"/>
+            <a:off x="12446000" y="127000"/>
             <a:ext cx="304800" cy="304800"/>
           </a:xfrm>
           <a:prstGeom prst="rect">
@@ -12713,7 +12713,7 @@
             <a:hlinkClick r:id="" action="ppaction://media"/>
             <a:extLst>
               <a:ext uri="{FF2B5EF4-FFF2-40B4-BE49-F238E27FC236}">
-                <a16:creationId xmlns:a16="http://schemas.microsoft.com/office/drawing/2014/main" id="{E58C0299-3020-8A67-B7FF-3DC5987A5062}"/>
+                <a16:creationId xmlns:a16="http://schemas.microsoft.com/office/drawing/2014/main" id="{D74A5BA9-D63A-C373-87F6-AD072004D357}"/>
               </a:ext>
             </a:extLst>
           </p:cNvPr>
@@ -12729,7 +12729,7 @@
                     <p:ext uri="{3AFAAA56-56D3-431D-BCD4-E75A35582382}">
                       <p173:tracksInfo xmlns:p173="http://schemas.microsoft.com/office/powerpoint/2017/3/main" displayLoc="slide">
                         <p173:trackLst>
-                          <p173:track id="{0D9B90EF-E60B-47FB-8B6E-D8CAE496D681}" label="English (captions)" lang="en-US" r:embed="rId8"/>
+                          <p173:track id="{49AFA31E-4B0A-4AC8-B816-4F2E96A021BF}" label="English (captions)" lang="en-US" r:embed="rId8"/>
                         </p173:trackLst>
                       </p173:tracksInfo>
                     </p:ext>
@@ -12747,7 +12747,7 @@
         </p:blipFill>
         <p:spPr>
           <a:xfrm>
-            <a:off x="127000" y="6350000"/>
+            <a:off x="12446000" y="127000"/>
             <a:ext cx="304800" cy="304800"/>
           </a:xfrm>
           <a:prstGeom prst="rect">
@@ -13884,7 +13884,7 @@
             <a:hlinkClick r:id="" action="ppaction://media"/>
             <a:extLst>
               <a:ext uri="{FF2B5EF4-FFF2-40B4-BE49-F238E27FC236}">
-                <a16:creationId xmlns:a16="http://schemas.microsoft.com/office/drawing/2014/main" id="{9C0646FE-B801-D76D-61B9-32EFBB4EACEB}"/>
+                <a16:creationId xmlns:a16="http://schemas.microsoft.com/office/drawing/2014/main" id="{C67571AE-1EC6-9451-06BA-986B8AF02D57}"/>
               </a:ext>
             </a:extLst>
           </p:cNvPr>
@@ -13900,7 +13900,7 @@
                     <p:ext uri="{3AFAAA56-56D3-431D-BCD4-E75A35582382}">
                       <p173:tracksInfo xmlns:p173="http://schemas.microsoft.com/office/powerpoint/2017/3/main" displayLoc="slide">
                         <p173:trackLst>
-                          <p173:track id="{1616A411-2345-490B-8134-9E15F9487292}" label="English (captions)" lang="en-US" r:embed="rId10"/>
+                          <p173:track id="{E1BDB16F-C558-4902-95F6-412BE8C922ED}" label="English (captions)" lang="en-US" r:embed="rId10"/>
                         </p173:trackLst>
                       </p173:tracksInfo>
                     </p:ext>
@@ -13918,7 +13918,7 @@
         </p:blipFill>
         <p:spPr>
           <a:xfrm>
-            <a:off x="127000" y="6350000"/>
+            <a:off x="12446000" y="127000"/>
             <a:ext cx="304800" cy="304800"/>
           </a:xfrm>
           <a:prstGeom prst="rect">
@@ -14991,7 +14991,7 @@
             <a:hlinkClick r:id="" action="ppaction://media"/>
             <a:extLst>
               <a:ext uri="{FF2B5EF4-FFF2-40B4-BE49-F238E27FC236}">
-                <a16:creationId xmlns:a16="http://schemas.microsoft.com/office/drawing/2014/main" id="{BC1F79B5-CA52-5ABF-B9E0-4A81CBC437A2}"/>
+                <a16:creationId xmlns:a16="http://schemas.microsoft.com/office/drawing/2014/main" id="{DB01D6B9-4343-7DC7-3C0B-2880D2C5D943}"/>
               </a:ext>
             </a:extLst>
           </p:cNvPr>
@@ -15007,7 +15007,7 @@
                     <p:ext uri="{3AFAAA56-56D3-431D-BCD4-E75A35582382}">
                       <p173:tracksInfo xmlns:p173="http://schemas.microsoft.com/office/powerpoint/2017/3/main" displayLoc="slide">
                         <p173:trackLst>
-                          <p173:track id="{C2434AB5-A7E6-41C4-B8F1-F50D5970BFAE}" label="English (captions)" lang="en-US" r:embed="rId8"/>
+                          <p173:track id="{4D6C2295-1498-4419-8E60-E3959B910161}" label="English (captions)" lang="en-US" r:embed="rId8"/>
                         </p173:trackLst>
                       </p173:tracksInfo>
                     </p:ext>
@@ -15025,7 +15025,7 @@
         </p:blipFill>
         <p:spPr>
           <a:xfrm>
-            <a:off x="127000" y="6350000"/>
+            <a:off x="12446000" y="127000"/>
             <a:ext cx="304800" cy="304800"/>
           </a:xfrm>
           <a:prstGeom prst="rect">
@@ -16266,7 +16266,7 @@
             <a:hlinkClick r:id="" action="ppaction://media"/>
             <a:extLst>
               <a:ext uri="{FF2B5EF4-FFF2-40B4-BE49-F238E27FC236}">
-                <a16:creationId xmlns:a16="http://schemas.microsoft.com/office/drawing/2014/main" id="{833E59FF-512B-93C0-5E56-F5D2A0C1BF6C}"/>
+                <a16:creationId xmlns:a16="http://schemas.microsoft.com/office/drawing/2014/main" id="{3EA58B20-F3F3-21A4-C879-B101EA4D549B}"/>
               </a:ext>
             </a:extLst>
           </p:cNvPr>
@@ -16282,7 +16282,7 @@
                     <p:ext uri="{3AFAAA56-56D3-431D-BCD4-E75A35582382}">
                       <p173:tracksInfo xmlns:p173="http://schemas.microsoft.com/office/powerpoint/2017/3/main" displayLoc="slide">
                         <p173:trackLst>
-                          <p173:track id="{679D234C-BC06-4E78-8F57-FEFADEA9AC37}" label="English (captions)" lang="en-US" r:embed="rId8"/>
+                          <p173:track id="{0CB016AE-B86B-41A8-868B-07B71ED84468}" label="English (captions)" lang="en-US" r:embed="rId8"/>
                         </p173:trackLst>
                       </p173:tracksInfo>
                     </p:ext>
@@ -16300,7 +16300,7 @@
         </p:blipFill>
         <p:spPr>
           <a:xfrm>
-            <a:off x="127000" y="6350000"/>
+            <a:off x="12446000" y="127000"/>
             <a:ext cx="304800" cy="304800"/>
           </a:xfrm>
           <a:prstGeom prst="rect">
@@ -18762,7 +18762,7 @@
             <a:hlinkClick r:id="" action="ppaction://media"/>
             <a:extLst>
               <a:ext uri="{FF2B5EF4-FFF2-40B4-BE49-F238E27FC236}">
-                <a16:creationId xmlns:a16="http://schemas.microsoft.com/office/drawing/2014/main" id="{E8269B73-D96D-B8A1-0079-4F2FEB72CBEB}"/>
+                <a16:creationId xmlns:a16="http://schemas.microsoft.com/office/drawing/2014/main" id="{8CCC86B8-AEA1-77E1-93EB-E266E0DB173B}"/>
               </a:ext>
             </a:extLst>
           </p:cNvPr>
@@ -18778,7 +18778,7 @@
                     <p:ext uri="{3AFAAA56-56D3-431D-BCD4-E75A35582382}">
                       <p173:tracksInfo xmlns:p173="http://schemas.microsoft.com/office/powerpoint/2017/3/main" displayLoc="slide">
                         <p173:trackLst>
-                          <p173:track id="{A4A4373B-B678-4084-AEEC-DBEC6867E87C}" label="English (captions)" lang="en-US" r:embed="rId7"/>
+                          <p173:track id="{2F32E23C-F48C-44EF-9CFC-07E10ED140A0}" label="English (captions)" lang="en-US" r:embed="rId7"/>
                         </p173:trackLst>
                       </p173:tracksInfo>
                     </p:ext>
@@ -18796,7 +18796,7 @@
         </p:blipFill>
         <p:spPr>
           <a:xfrm>
-            <a:off x="127000" y="6350000"/>
+            <a:off x="12446000" y="127000"/>
             <a:ext cx="304800" cy="304800"/>
           </a:xfrm>
           <a:prstGeom prst="rect">
@@ -20329,7 +20329,7 @@
             <a:hlinkClick r:id="" action="ppaction://media"/>
             <a:extLst>
               <a:ext uri="{FF2B5EF4-FFF2-40B4-BE49-F238E27FC236}">
-                <a16:creationId xmlns:a16="http://schemas.microsoft.com/office/drawing/2014/main" id="{1091560B-C38B-87F7-5EAC-D803BB1E9331}"/>
+                <a16:creationId xmlns:a16="http://schemas.microsoft.com/office/drawing/2014/main" id="{E9368C16-433D-9B5B-AC7B-85FF80B6EC92}"/>
               </a:ext>
             </a:extLst>
           </p:cNvPr>
@@ -20345,7 +20345,7 @@
                     <p:ext uri="{3AFAAA56-56D3-431D-BCD4-E75A35582382}">
                       <p173:tracksInfo xmlns:p173="http://schemas.microsoft.com/office/powerpoint/2017/3/main" displayLoc="slide">
                         <p173:trackLst>
-                          <p173:track id="{4FF76E54-6329-4C87-AFD5-E339A5909CFB}" label="English (captions)" lang="en-US" r:embed="rId12"/>
+                          <p173:track id="{5E999D24-F384-4613-93D5-DAA569BB7448}" label="English (captions)" lang="en-US" r:embed="rId12"/>
                         </p173:trackLst>
                       </p173:tracksInfo>
                     </p:ext>
@@ -20363,7 +20363,7 @@
         </p:blipFill>
         <p:spPr>
           <a:xfrm>
-            <a:off x="127000" y="6350000"/>
+            <a:off x="12446000" y="127000"/>
             <a:ext cx="304800" cy="304800"/>
           </a:xfrm>
           <a:prstGeom prst="rect">
@@ -22033,7 +22033,7 @@
             <a:hlinkClick r:id="" action="ppaction://media"/>
             <a:extLst>
               <a:ext uri="{FF2B5EF4-FFF2-40B4-BE49-F238E27FC236}">
-                <a16:creationId xmlns:a16="http://schemas.microsoft.com/office/drawing/2014/main" id="{63E6D7CE-634F-221F-0A4F-881A665BE166}"/>
+                <a16:creationId xmlns:a16="http://schemas.microsoft.com/office/drawing/2014/main" id="{ED016BD5-287B-A518-4F8E-0283F573C628}"/>
               </a:ext>
             </a:extLst>
           </p:cNvPr>
@@ -22049,7 +22049,7 @@
                     <p:ext uri="{3AFAAA56-56D3-431D-BCD4-E75A35582382}">
                       <p173:tracksInfo xmlns:p173="http://schemas.microsoft.com/office/powerpoint/2017/3/main" displayLoc="slide">
                         <p173:trackLst>
-                          <p173:track id="{2B624370-F86B-432D-9B71-DC6532201DA8}" label="English (captions)" lang="en-US" r:embed="rId9"/>
+                          <p173:track id="{6F4D4A27-D2F6-4E85-B289-C39921646075}" label="English (captions)" lang="en-US" r:embed="rId9"/>
                         </p173:trackLst>
                       </p173:tracksInfo>
                     </p:ext>
@@ -22067,7 +22067,7 @@
         </p:blipFill>
         <p:spPr>
           <a:xfrm>
-            <a:off x="127000" y="6350000"/>
+            <a:off x="12446000" y="127000"/>
             <a:ext cx="304800" cy="304800"/>
           </a:xfrm>
           <a:prstGeom prst="rect">
